--- a/docs/slides.pptx
+++ b/docs/slides.pptx
@@ -948,8 +948,7 @@
           <a:p>
             <a:r>
               <a:rPr lang="en-US" dirty="0"/>
-              <a:t>ここは発表者ご自身の感想を記入してください。例:
-・大変だった点 / 工夫した点 / やってみて分かったこと / 今後やってみたいこと</a:t>
+              <a:t/>
             </a:r>
             <a:endParaRPr lang="en-US" dirty="0"/>
           </a:p>
